--- a/presentation/presentation.pptx
+++ b/presentation/presentation.pptx
@@ -3933,7 +3933,9 @@
         <p:nvSpPr>
           <p:cNvPr id="1" name="TextBox 3"/>
           <p:cNvSpPr txBox="1"/>
-          <p:nvPr/>
+          <p:nvPr>
+            <p:ph idx="1"/>
+          </p:nvPr>
         </p:nvSpPr>
         <p:spPr>
           <a:xfrm>
@@ -4381,7 +4383,9 @@
         <p:nvSpPr>
           <p:cNvPr id="1" name="TextBox 3"/>
           <p:cNvSpPr txBox="1"/>
-          <p:nvPr/>
+          <p:nvPr>
+            <p:ph idx="1"/>
+          </p:nvPr>
         </p:nvSpPr>
         <p:spPr>
           <a:xfrm>
@@ -5586,7 +5590,7 @@
             </a:r>
             <a:r>
               <a:rPr/>
-              <a:t>. Cambridge, [New York]: Open Book Publishers ; NYU Global Institute for Advanced Study.</a:t>
+              <a:t>. Open Book Publishers ; NYU Global Institute for Advanced Study.</a:t>
             </a:r>
           </a:p>
           <a:p>
